--- a/public/fun/pack/pptx/wedding/결혼식_01_소개중심_외갓집매화.pptx
+++ b/public/fun/pack/pptx/wedding/결혼식_01_소개중심_외갓집매화.pptx
@@ -3347,7 +3347,7 @@
             <a:r>
               <a:rPr sz="3600" b="1" i="0">
                 <a:solidFill>
-                  <a:srgbClr val="742F4C"/>
+                  <a:srgbClr val="6F1F41"/>
                 </a:solidFill>
               </a:rPr>
               <a:t>저희 결혼합니다</a:t>
@@ -3385,7 +3385,7 @@
             <a:r>
               <a:rPr sz="1700" b="0" i="1">
                 <a:solidFill>
-                  <a:srgbClr val="742F4C"/>
+                  <a:srgbClr val="6F1F41"/>
                 </a:solidFill>
               </a:rPr>
               <a:t>서로 다른 두 사람이 한 집에서 살기로 했습니다</a:t>
@@ -3460,7 +3460,7 @@
     <p:bg>
       <p:bgPr>
         <a:solidFill>
-          <a:srgbClr val="F9F1F4"/>
+          <a:srgbClr val="FCF3F7"/>
         </a:solidFill>
         <a:effectLst/>
       </p:bgPr>
@@ -3487,7 +3487,7 @@
             <a:avLst/>
           </a:prstGeom>
           <a:solidFill>
-            <a:srgbClr val="B8517C"/>
+            <a:srgbClr val="CD4C82"/>
           </a:solidFill>
           <a:ln>
             <a:noFill/>
@@ -3516,7 +3516,7 @@
             <a:avLst/>
           </a:prstGeom>
           <a:solidFill>
-            <a:srgbClr val="3B9142"/>
+            <a:srgbClr val="339941"/>
           </a:solidFill>
           <a:ln>
             <a:noFill/>
@@ -3560,7 +3560,7 @@
             <a:r>
               <a:rPr sz="3000" b="1" i="0">
                 <a:solidFill>
-                  <a:srgbClr val="742F4C"/>
+                  <a:srgbClr val="6F1F41"/>
                 </a:solidFill>
               </a:rPr>
               <a:t>신랑 · 신부 소개</a:t>
@@ -3583,11 +3583,11 @@
             <a:avLst/>
           </a:prstGeom>
           <a:solidFill>
-            <a:srgbClr val="EFD2DE"/>
+            <a:srgbClr val="F7D4E3"/>
           </a:solidFill>
           <a:ln w="19050">
             <a:solidFill>
-              <a:srgbClr val="B8517C"/>
+              <a:srgbClr val="CD4C82"/>
             </a:solidFill>
             <a:prstDash val="dash"/>
           </a:ln>
@@ -3606,7 +3606,7 @@
             <a:r>
               <a:rPr sz="1200" b="0" i="0">
                 <a:solidFill>
-                  <a:srgbClr val="742F4C"/>
+                  <a:srgbClr val="6F1F41"/>
                 </a:solidFill>
               </a:rPr>
               <a:t>사진</a:t>
@@ -3644,7 +3644,7 @@
             <a:r>
               <a:rPr sz="1600" b="1" i="0">
                 <a:solidFill>
-                  <a:srgbClr val="742F4C"/>
+                  <a:srgbClr val="6F1F41"/>
                 </a:solidFill>
               </a:rPr>
               <a:t>신랑</a:t>
@@ -3735,11 +3735,11 @@
             <a:avLst/>
           </a:prstGeom>
           <a:solidFill>
-            <a:srgbClr val="EFD2DE"/>
+            <a:srgbClr val="F7D4E3"/>
           </a:solidFill>
           <a:ln w="19050">
             <a:solidFill>
-              <a:srgbClr val="B8517C"/>
+              <a:srgbClr val="CD4C82"/>
             </a:solidFill>
             <a:prstDash val="dash"/>
           </a:ln>
@@ -3758,7 +3758,7 @@
             <a:r>
               <a:rPr sz="1200" b="0" i="0">
                 <a:solidFill>
-                  <a:srgbClr val="742F4C"/>
+                  <a:srgbClr val="6F1F41"/>
                 </a:solidFill>
               </a:rPr>
               <a:t>사진</a:t>
@@ -3796,7 +3796,7 @@
             <a:r>
               <a:rPr sz="1600" b="1" i="0">
                 <a:solidFill>
-                  <a:srgbClr val="742F4C"/>
+                  <a:srgbClr val="6F1F41"/>
                 </a:solidFill>
               </a:rPr>
               <a:t>신부</a:t>
@@ -3886,7 +3886,7 @@
     <p:bg>
       <p:bgPr>
         <a:solidFill>
-          <a:srgbClr val="F9F1F4"/>
+          <a:srgbClr val="FCF3F7"/>
         </a:solidFill>
         <a:effectLst/>
       </p:bgPr>
@@ -3913,7 +3913,7 @@
             <a:avLst/>
           </a:prstGeom>
           <a:solidFill>
-            <a:srgbClr val="B8517C"/>
+            <a:srgbClr val="CD4C82"/>
           </a:solidFill>
           <a:ln>
             <a:noFill/>
@@ -3942,7 +3942,7 @@
             <a:avLst/>
           </a:prstGeom>
           <a:solidFill>
-            <a:srgbClr val="3B9142"/>
+            <a:srgbClr val="339941"/>
           </a:solidFill>
           <a:ln>
             <a:noFill/>
@@ -3986,7 +3986,7 @@
             <a:r>
               <a:rPr sz="3000" b="1" i="0">
                 <a:solidFill>
-                  <a:srgbClr val="742F4C"/>
+                  <a:srgbClr val="6F1F41"/>
                 </a:solidFill>
               </a:rPr>
               <a:t>우리 두 사람</a:t>
@@ -4011,11 +4011,11 @@
             </a:avLst>
           </a:prstGeom>
           <a:solidFill>
-            <a:srgbClr val="F9F1F4"/>
+            <a:srgbClr val="FCF3F7"/>
           </a:solidFill>
           <a:ln w="12700">
             <a:solidFill>
-              <a:srgbClr val="EFD2DE"/>
+              <a:srgbClr val="F7D4E3"/>
             </a:solidFill>
           </a:ln>
         </p:spPr>
@@ -4044,7 +4044,7 @@
             </a:avLst>
           </a:prstGeom>
           <a:solidFill>
-            <a:srgbClr val="B8517C"/>
+            <a:srgbClr val="CD4C82"/>
           </a:solidFill>
           <a:ln>
             <a:noFill/>
@@ -4196,11 +4196,11 @@
             </a:avLst>
           </a:prstGeom>
           <a:solidFill>
-            <a:srgbClr val="EFD2DE"/>
+            <a:srgbClr val="F7D4E3"/>
           </a:solidFill>
           <a:ln w="12700">
             <a:solidFill>
-              <a:srgbClr val="EFD2DE"/>
+              <a:srgbClr val="F7D4E3"/>
             </a:solidFill>
           </a:ln>
         </p:spPr>
@@ -4229,7 +4229,7 @@
             </a:avLst>
           </a:prstGeom>
           <a:solidFill>
-            <a:srgbClr val="742F4C"/>
+            <a:srgbClr val="6F1F41"/>
           </a:solidFill>
           <a:ln>
             <a:noFill/>
@@ -4378,7 +4378,7 @@
     <p:bg>
       <p:bgPr>
         <a:solidFill>
-          <a:srgbClr val="F9F1F4"/>
+          <a:srgbClr val="FCF3F7"/>
         </a:solidFill>
         <a:effectLst/>
       </p:bgPr>
@@ -4405,7 +4405,7 @@
             <a:avLst/>
           </a:prstGeom>
           <a:solidFill>
-            <a:srgbClr val="B8517C"/>
+            <a:srgbClr val="CD4C82"/>
           </a:solidFill>
           <a:ln>
             <a:noFill/>
@@ -4434,7 +4434,7 @@
             <a:avLst/>
           </a:prstGeom>
           <a:solidFill>
-            <a:srgbClr val="3B9142"/>
+            <a:srgbClr val="339941"/>
           </a:solidFill>
           <a:ln>
             <a:noFill/>
@@ -4478,7 +4478,7 @@
             <a:r>
               <a:rPr sz="3000" b="1" i="0">
                 <a:solidFill>
-                  <a:srgbClr val="742F4C"/>
+                  <a:srgbClr val="6F1F41"/>
                 </a:solidFill>
               </a:rPr>
               <a:t>서로에게 하고 싶은 말</a:t>
@@ -4503,11 +4503,11 @@
             </a:avLst>
           </a:prstGeom>
           <a:solidFill>
-            <a:srgbClr val="F9F1F4"/>
+            <a:srgbClr val="FCF3F7"/>
           </a:solidFill>
           <a:ln w="12700">
             <a:solidFill>
-              <a:srgbClr val="EFD2DE"/>
+              <a:srgbClr val="F7D4E3"/>
             </a:solidFill>
           </a:ln>
         </p:spPr>
@@ -4536,7 +4536,7 @@
             </a:avLst>
           </a:prstGeom>
           <a:solidFill>
-            <a:srgbClr val="B8517C"/>
+            <a:srgbClr val="CD4C82"/>
           </a:solidFill>
           <a:ln>
             <a:noFill/>
@@ -4648,11 +4648,11 @@
             </a:avLst>
           </a:prstGeom>
           <a:solidFill>
-            <a:srgbClr val="EFD2DE"/>
+            <a:srgbClr val="F7D4E3"/>
           </a:solidFill>
           <a:ln w="12700">
             <a:solidFill>
-              <a:srgbClr val="EFD2DE"/>
+              <a:srgbClr val="F7D4E3"/>
             </a:solidFill>
           </a:ln>
         </p:spPr>
@@ -4681,7 +4681,7 @@
             </a:avLst>
           </a:prstGeom>
           <a:solidFill>
-            <a:srgbClr val="742F4C"/>
+            <a:srgbClr val="6F1F41"/>
           </a:solidFill>
           <a:ln>
             <a:noFill/>
@@ -4790,7 +4790,7 @@
     <p:bg>
       <p:bgPr>
         <a:solidFill>
-          <a:srgbClr val="F9F1F4"/>
+          <a:srgbClr val="FCF3F7"/>
         </a:solidFill>
         <a:effectLst/>
       </p:bgPr>
@@ -4817,7 +4817,7 @@
             <a:avLst/>
           </a:prstGeom>
           <a:solidFill>
-            <a:srgbClr val="B8517C"/>
+            <a:srgbClr val="CD4C82"/>
           </a:solidFill>
           <a:ln>
             <a:noFill/>
@@ -4846,7 +4846,7 @@
             <a:avLst/>
           </a:prstGeom>
           <a:solidFill>
-            <a:srgbClr val="3B9142"/>
+            <a:srgbClr val="339941"/>
           </a:solidFill>
           <a:ln>
             <a:noFill/>
@@ -4890,7 +4890,7 @@
             <a:r>
               <a:rPr sz="3000" b="1" i="0">
                 <a:solidFill>
-                  <a:srgbClr val="742F4C"/>
+                  <a:srgbClr val="6F1F41"/>
                 </a:solidFill>
               </a:rPr>
               <a:t>웨딩 사진</a:t>
@@ -4915,11 +4915,11 @@
             </a:avLst>
           </a:prstGeom>
           <a:solidFill>
-            <a:srgbClr val="EFD2DE"/>
+            <a:srgbClr val="F7D4E3"/>
           </a:solidFill>
           <a:ln w="19050">
             <a:solidFill>
-              <a:srgbClr val="B8517C"/>
+              <a:srgbClr val="CD4C82"/>
             </a:solidFill>
             <a:prstDash val="dash"/>
           </a:ln>
@@ -4938,7 +4938,7 @@
             <a:r>
               <a:rPr sz="1200" b="0" i="0">
                 <a:solidFill>
-                  <a:srgbClr val="742F4C"/>
+                  <a:srgbClr val="6F1F41"/>
                 </a:solidFill>
               </a:rPr>
               <a:t>사진 1</a:t>
@@ -4963,11 +4963,11 @@
             </a:avLst>
           </a:prstGeom>
           <a:solidFill>
-            <a:srgbClr val="EFD2DE"/>
+            <a:srgbClr val="F7D4E3"/>
           </a:solidFill>
           <a:ln w="19050">
             <a:solidFill>
-              <a:srgbClr val="B8517C"/>
+              <a:srgbClr val="CD4C82"/>
             </a:solidFill>
             <a:prstDash val="dash"/>
           </a:ln>
@@ -4986,7 +4986,7 @@
             <a:r>
               <a:rPr sz="1200" b="0" i="0">
                 <a:solidFill>
-                  <a:srgbClr val="742F4C"/>
+                  <a:srgbClr val="6F1F41"/>
                 </a:solidFill>
               </a:rPr>
               <a:t>사진 2</a:t>
@@ -5011,11 +5011,11 @@
             </a:avLst>
           </a:prstGeom>
           <a:solidFill>
-            <a:srgbClr val="EFD2DE"/>
+            <a:srgbClr val="F7D4E3"/>
           </a:solidFill>
           <a:ln w="19050">
             <a:solidFill>
-              <a:srgbClr val="B8517C"/>
+              <a:srgbClr val="CD4C82"/>
             </a:solidFill>
             <a:prstDash val="dash"/>
           </a:ln>
@@ -5034,7 +5034,7 @@
             <a:r>
               <a:rPr sz="1200" b="0" i="0">
                 <a:solidFill>
-                  <a:srgbClr val="742F4C"/>
+                  <a:srgbClr val="6F1F41"/>
                 </a:solidFill>
               </a:rPr>
               <a:t>사진 3</a:t>
@@ -5059,11 +5059,11 @@
             </a:avLst>
           </a:prstGeom>
           <a:solidFill>
-            <a:srgbClr val="EFD2DE"/>
+            <a:srgbClr val="F7D4E3"/>
           </a:solidFill>
           <a:ln w="19050">
             <a:solidFill>
-              <a:srgbClr val="B8517C"/>
+              <a:srgbClr val="CD4C82"/>
             </a:solidFill>
             <a:prstDash val="dash"/>
           </a:ln>
@@ -5082,7 +5082,7 @@
             <a:r>
               <a:rPr sz="1200" b="0" i="0">
                 <a:solidFill>
-                  <a:srgbClr val="742F4C"/>
+                  <a:srgbClr val="6F1F41"/>
                 </a:solidFill>
               </a:rPr>
               <a:t>사진 4</a:t>
@@ -5107,11 +5107,11 @@
             </a:avLst>
           </a:prstGeom>
           <a:solidFill>
-            <a:srgbClr val="EFD2DE"/>
+            <a:srgbClr val="F7D4E3"/>
           </a:solidFill>
           <a:ln w="19050">
             <a:solidFill>
-              <a:srgbClr val="B8517C"/>
+              <a:srgbClr val="CD4C82"/>
             </a:solidFill>
             <a:prstDash val="dash"/>
           </a:ln>
@@ -5130,7 +5130,7 @@
             <a:r>
               <a:rPr sz="1200" b="0" i="0">
                 <a:solidFill>
-                  <a:srgbClr val="742F4C"/>
+                  <a:srgbClr val="6F1F41"/>
                 </a:solidFill>
               </a:rPr>
               <a:t>사진 5</a:t>
@@ -5155,11 +5155,11 @@
             </a:avLst>
           </a:prstGeom>
           <a:solidFill>
-            <a:srgbClr val="EFD2DE"/>
+            <a:srgbClr val="F7D4E3"/>
           </a:solidFill>
           <a:ln w="19050">
             <a:solidFill>
-              <a:srgbClr val="B8517C"/>
+              <a:srgbClr val="CD4C82"/>
             </a:solidFill>
             <a:prstDash val="dash"/>
           </a:ln>
@@ -5178,7 +5178,7 @@
             <a:r>
               <a:rPr sz="1200" b="0" i="0">
                 <a:solidFill>
-                  <a:srgbClr val="742F4C"/>
+                  <a:srgbClr val="6F1F41"/>
                 </a:solidFill>
               </a:rPr>
               <a:t>사진 6</a:t>
@@ -5258,7 +5258,7 @@
             <a:r>
               <a:rPr sz="3400" b="1" i="0">
                 <a:solidFill>
-                  <a:srgbClr val="742F4C"/>
+                  <a:srgbClr val="6F1F41"/>
                 </a:solidFill>
               </a:rPr>
               <a:t>와 주셔서 고맙습니다</a:t>
@@ -5296,7 +5296,7 @@
             <a:r>
               <a:rPr sz="1700" b="0" i="1">
                 <a:solidFill>
-                  <a:srgbClr val="742F4C"/>
+                  <a:srgbClr val="6F1F41"/>
                 </a:solidFill>
               </a:rPr>
               <a:t>잘 살겠습니다</a:t>
@@ -5361,34 +5361,34 @@
         <a:sysClr val="window" lastClr="FFFFFF"/>
       </a:lt1>
       <a:dk2>
-        <a:srgbClr val="742F4C"/>
+        <a:srgbClr val="6F1F41"/>
       </a:dk2>
       <a:lt2>
-        <a:srgbClr val="F9F1F4"/>
+        <a:srgbClr val="FCF3F7"/>
       </a:lt2>
       <a:accent1>
-        <a:srgbClr val="B8517C"/>
+        <a:srgbClr val="CD4C82"/>
       </a:accent1>
       <a:accent2>
-        <a:srgbClr val="3B9142"/>
+        <a:srgbClr val="339941"/>
       </a:accent2>
       <a:accent3>
-        <a:srgbClr val="742F4C"/>
+        <a:srgbClr val="6F1F41"/>
       </a:accent3>
       <a:accent4>
-        <a:srgbClr val="EFD2DE"/>
+        <a:srgbClr val="F7D4E3"/>
       </a:accent4>
       <a:accent5>
-        <a:srgbClr val="7A715F"/>
+        <a:srgbClr val="807262"/>
       </a:accent5>
       <a:accent6>
-        <a:srgbClr val="AC8294"/>
+        <a:srgbClr val="A9798D"/>
       </a:accent6>
       <a:hlink>
-        <a:srgbClr val="B8517C"/>
+        <a:srgbClr val="CD4C82"/>
       </a:hlink>
       <a:folHlink>
-        <a:srgbClr val="742F4C"/>
+        <a:srgbClr val="6F1F41"/>
       </a:folHlink>
     </a:clrScheme>
     <a:fontScheme name="Office">

--- a/public/fun/pack/pptx/wedding/결혼식_01_소개중심_외갓집매화.pptx
+++ b/public/fun/pack/pptx/wedding/결혼식_01_소개중심_외갓집매화.pptx
@@ -3286,6 +3286,14 @@
 <file path=ppt/slides/slide1.xml><?xml version="1.0" encoding="utf-8"?>
 <p:sld xmlns:a="http://schemas.openxmlformats.org/drawingml/2006/main" xmlns:p="http://schemas.openxmlformats.org/presentationml/2006/main" xmlns:r="http://schemas.openxmlformats.org/officeDocument/2006/relationships">
   <p:cSld>
+    <p:bg>
+      <p:bgPr>
+        <a:solidFill>
+          <a:srgbClr val="FDEAF2"/>
+        </a:solidFill>
+        <a:effectLst/>
+      </p:bgPr>
+    </p:bg>
     <p:spTree>
       <p:nvGrpSpPr>
         <p:cNvPr id="1" name=""/>
@@ -3293,30 +3301,119 @@
         <p:nvPr/>
       </p:nvGrpSpPr>
       <p:grpSpPr/>
-      <p:pic>
-        <p:nvPicPr>
-          <p:cNvPr id="3" name="표지 그림" descr="wedding-01.jpg"/>
-          <p:cNvPicPr>
-            <a:picLocks noChangeAspect="1"/>
-          </p:cNvPicPr>
+      <p:sp>
+        <p:nvSpPr>
+          <p:cNvPr id="3" name="사진 자리"/>
+          <p:cNvSpPr/>
           <p:nvPr/>
-        </p:nvPicPr>
-        <p:blipFill>
-          <a:blip r:embed="rId2"/>
-          <a:stretch>
-            <a:fillRect/>
-          </a:stretch>
-        </p:blipFill>
-        <p:spPr>
-          <a:xfrm>
-            <a:off x="0" y="0"/>
-            <a:ext cx="12191695" cy="6858000"/>
+        </p:nvSpPr>
+        <p:spPr>
+          <a:xfrm>
+            <a:off x="7558851" y="685800"/>
+            <a:ext cx="3169840" cy="5486400"/>
+          </a:xfrm>
+          <a:prstGeom prst="round2SameRect">
+            <a:avLst>
+              <a:gd name="adj1" fmla="val 50000"/>
+              <a:gd name="adj2" fmla="val 0"/>
+            </a:avLst>
+          </a:prstGeom>
+          <a:solidFill>
+            <a:srgbClr val="F2A6C6"/>
+          </a:solidFill>
+          <a:ln>
+            <a:noFill/>
+          </a:ln>
+        </p:spPr>
+        <p:txBody>
+          <a:bodyPr rtlCol="0" anchor="ctr" wrap="square" lIns="54864" rIns="54864" tIns="27432" bIns="27432">
+            <a:noAutofit/>
+          </a:bodyPr>
+          <a:lstStyle/>
+          <a:p>
+            <a:pPr algn="ctr">
+              <a:lnSpc>
+                <a:spcPct val="100000"/>
+              </a:lnSpc>
+            </a:pPr>
+            <a:r>
+              <a:rPr sz="1400" b="0" i="0">
+                <a:solidFill>
+                  <a:srgbClr val="492735"/>
+                </a:solidFill>
+              </a:rPr>
+              <a:t>사진을 넣어 주세요</a:t>
+            </a:r>
+          </a:p>
+        </p:txBody>
+      </p:sp>
+      <p:sp>
+        <p:nvSpPr>
+          <p:cNvPr id="4" name="장식"/>
+          <p:cNvSpPr/>
+          <p:nvPr/>
+        </p:nvSpPr>
+        <p:spPr>
+          <a:xfrm>
+            <a:off x="6827349" y="4251960"/>
+            <a:ext cx="1005840" cy="1005840"/>
+          </a:xfrm>
+          <a:prstGeom prst="ellipse">
+            <a:avLst/>
+          </a:prstGeom>
+          <a:solidFill>
+            <a:srgbClr val="F2A6C6"/>
+          </a:solidFill>
+          <a:ln>
+            <a:noFill/>
+          </a:ln>
+        </p:spPr>
+        <p:txBody>
+          <a:bodyPr rtlCol="0" anchor="ctr"/>
+          <a:lstStyle/>
+          <a:p>
+            <a:pPr algn="ctr"/>
+          </a:p>
+        </p:txBody>
+      </p:sp>
+      <p:sp>
+        <p:nvSpPr>
+          <p:cNvPr id="5" name="라벨"/>
+          <p:cNvSpPr txBox="1"/>
+          <p:nvPr/>
+        </p:nvSpPr>
+        <p:spPr>
+          <a:xfrm>
+            <a:off x="822960" y="2148840"/>
+            <a:ext cx="5608179" cy="274320"/>
           </a:xfrm>
           <a:prstGeom prst="rect">
             <a:avLst/>
           </a:prstGeom>
-        </p:spPr>
-      </p:pic>
+          <a:noFill/>
+        </p:spPr>
+        <p:txBody>
+          <a:bodyPr wrap="square" lIns="54864" rIns="54864" tIns="27432" bIns="27432" anchor="t">
+            <a:noAutofit/>
+          </a:bodyPr>
+          <a:lstStyle/>
+          <a:p>
+            <a:pPr algn="l">
+              <a:lnSpc>
+                <a:spcPct val="115000"/>
+              </a:lnSpc>
+            </a:pPr>
+            <a:r>
+              <a:rPr sz="1000" b="1" i="0" spc="250">
+                <a:solidFill>
+                  <a:srgbClr val="26231F"/>
+                </a:solidFill>
+              </a:rPr>
+              <a:t>WEDDING</a:t>
+            </a:r>
+          </a:p>
+        </p:txBody>
+      </p:sp>
       <p:sp>
         <p:nvSpPr>
           <p:cNvPr id="2" name="Title 1"/>
@@ -3329,8 +3426,8 @@
         </p:nvSpPr>
         <p:spPr>
           <a:xfrm>
-            <a:off x="853418" y="2057400"/>
-            <a:ext cx="6095847" cy="1554480"/>
+            <a:off x="822960" y="2606040"/>
+            <a:ext cx="5608179" cy="1188720"/>
           </a:xfrm>
         </p:spPr>
         <p:txBody>
@@ -3347,7 +3444,7 @@
             <a:r>
               <a:rPr sz="3600" b="1" i="0">
                 <a:solidFill>
-                  <a:srgbClr val="6F1F41"/>
+                  <a:srgbClr val="26231F"/>
                 </a:solidFill>
               </a:rPr>
               <a:t>저희 결혼합니다</a:t>
@@ -3357,14 +3454,14 @@
       </p:sp>
       <p:sp>
         <p:nvSpPr>
-          <p:cNvPr id="4" name="한 줄 문구"/>
+          <p:cNvPr id="6" name="한 줄 문구"/>
           <p:cNvSpPr txBox="1"/>
           <p:nvPr/>
         </p:nvSpPr>
         <p:spPr>
           <a:xfrm>
-            <a:off x="853418" y="3749039"/>
-            <a:ext cx="6095847" cy="822960"/>
+            <a:off x="822960" y="3886200"/>
+            <a:ext cx="5608179" cy="822960"/>
           </a:xfrm>
           <a:prstGeom prst="rect">
             <a:avLst/>
@@ -3383,9 +3480,9 @@
               </a:lnSpc>
             </a:pPr>
             <a:r>
-              <a:rPr sz="1700" b="0" i="1">
-                <a:solidFill>
-                  <a:srgbClr val="6F1F41"/>
+              <a:rPr sz="1700" b="0" i="0">
+                <a:solidFill>
+                  <a:srgbClr val="26231F"/>
                 </a:solidFill>
               </a:rPr>
               <a:t>서로 다른 두 사람이 한 집에서 살기로 했습니다</a:t>
@@ -3395,14 +3492,14 @@
       </p:sp>
       <p:sp>
         <p:nvSpPr>
-          <p:cNvPr id="5" name="안내 문구"/>
+          <p:cNvPr id="7" name="안내 문구"/>
           <p:cNvSpPr txBox="1"/>
           <p:nvPr/>
         </p:nvSpPr>
         <p:spPr>
           <a:xfrm>
-            <a:off x="853418" y="4617720"/>
-            <a:ext cx="6095847" cy="914400"/>
+            <a:off x="822960" y="4754880"/>
+            <a:ext cx="5608179" cy="914400"/>
           </a:xfrm>
           <a:prstGeom prst="rect">
             <a:avLst/>
@@ -3423,7 +3520,7 @@
             <a:r>
               <a:rPr sz="1400" b="0" i="0">
                 <a:solidFill>
-                  <a:srgbClr val="666666"/>
+                  <a:srgbClr val="26231F"/>
                 </a:solidFill>
               </a:rPr>
               <a:t>신랑 이름 ♥ 신부 이름</a:t>
@@ -3438,10 +3535,10 @@
             <a:r>
               <a:rPr sz="1400" b="0" i="0">
                 <a:solidFill>
-                  <a:srgbClr val="666666"/>
+                  <a:srgbClr val="26231F"/>
                 </a:solidFill>
               </a:rPr>
-              <a:t>2027. 00. 00 · 예식장 이름</a:t>
+              <a:t>날짜 입력 · 예식장 이름</a:t>
             </a:r>
           </a:p>
         </p:txBody>
@@ -3460,7 +3557,7 @@
     <p:bg>
       <p:bgPr>
         <a:solidFill>
-          <a:srgbClr val="FCF3F7"/>
+          <a:srgbClr val="FDFAFB"/>
         </a:solidFill>
         <a:effectLst/>
       </p:bgPr>
@@ -3480,14 +3577,14 @@
         </p:nvSpPr>
         <p:spPr>
           <a:xfrm>
-            <a:off x="0" y="0"/>
-            <a:ext cx="12191695" cy="274320"/>
-          </a:xfrm>
-          <a:prstGeom prst="rect">
+            <a:off x="10180015" y="-1645920"/>
+            <a:ext cx="3474720" cy="3474720"/>
+          </a:xfrm>
+          <a:prstGeom prst="ellipse">
             <a:avLst/>
           </a:prstGeom>
           <a:solidFill>
-            <a:srgbClr val="CD4C82"/>
+            <a:srgbClr val="F2A6C6"/>
           </a:solidFill>
           <a:ln>
             <a:noFill/>
@@ -3503,20 +3600,58 @@
       </p:sp>
       <p:sp>
         <p:nvSpPr>
-          <p:cNvPr id="4" name="장식"/>
-          <p:cNvSpPr/>
+          <p:cNvPr id="4" name="상단 라벨"/>
+          <p:cNvSpPr txBox="1"/>
           <p:nvPr/>
         </p:nvSpPr>
         <p:spPr>
           <a:xfrm>
-            <a:off x="0" y="274320"/>
-            <a:ext cx="12191695" cy="54864"/>
+            <a:off x="640080" y="274320"/>
+            <a:ext cx="5486400" cy="274320"/>
           </a:xfrm>
           <a:prstGeom prst="rect">
             <a:avLst/>
           </a:prstGeom>
+          <a:noFill/>
+        </p:spPr>
+        <p:txBody>
+          <a:bodyPr wrap="square" lIns="54864" rIns="54864" tIns="27432" bIns="27432" anchor="ctr">
+            <a:noAutofit/>
+          </a:bodyPr>
+          <a:lstStyle/>
+          <a:p>
+            <a:pPr algn="l">
+              <a:lnSpc>
+                <a:spcPct val="115000"/>
+              </a:lnSpc>
+            </a:pPr>
+            <a:r>
+              <a:rPr sz="900" b="1" i="0" spc="250">
+                <a:solidFill>
+                  <a:srgbClr val="26231F"/>
+                </a:solidFill>
+              </a:rPr>
+              <a:t>WEDDING</a:t>
+            </a:r>
+          </a:p>
+        </p:txBody>
+      </p:sp>
+      <p:sp>
+        <p:nvSpPr>
+          <p:cNvPr id="5" name="포인트"/>
+          <p:cNvSpPr/>
+          <p:nvPr/>
+        </p:nvSpPr>
+        <p:spPr>
+          <a:xfrm>
+            <a:off x="11048695" y="502919"/>
+            <a:ext cx="274320" cy="109728"/>
+          </a:xfrm>
+          <a:prstGeom prst="wave">
+            <a:avLst/>
+          </a:prstGeom>
           <a:solidFill>
-            <a:srgbClr val="339941"/>
+            <a:srgbClr val="FFFFFF"/>
           </a:solidFill>
           <a:ln>
             <a:noFill/>
@@ -3542,8 +3677,8 @@
         </p:nvSpPr>
         <p:spPr>
           <a:xfrm>
-            <a:off x="640080" y="457200"/>
-            <a:ext cx="9722815" cy="868680"/>
+            <a:off x="640080" y="658368"/>
+            <a:ext cx="9082735" cy="868680"/>
           </a:xfrm>
         </p:spPr>
         <p:txBody>
@@ -3560,7 +3695,7 @@
             <a:r>
               <a:rPr sz="3000" b="1" i="0">
                 <a:solidFill>
-                  <a:srgbClr val="6F1F41"/>
+                  <a:srgbClr val="26231F"/>
                 </a:solidFill>
               </a:rPr>
               <a:t>신랑 · 신부 소개</a:t>
@@ -3570,25 +3705,23 @@
       </p:sp>
       <p:sp>
         <p:nvSpPr>
-          <p:cNvPr id="5" name="사진 자리"/>
+          <p:cNvPr id="6" name="사진 자리"/>
           <p:cNvSpPr/>
           <p:nvPr/>
         </p:nvSpPr>
         <p:spPr>
           <a:xfrm>
-            <a:off x="1939213" y="1600200"/>
-            <a:ext cx="2400300" cy="2400300"/>
+            <a:off x="1996363" y="1783080"/>
+            <a:ext cx="2286000" cy="2286000"/>
           </a:xfrm>
           <a:prstGeom prst="ellipse">
             <a:avLst/>
           </a:prstGeom>
           <a:solidFill>
-            <a:srgbClr val="F7D4E3"/>
+            <a:srgbClr val="FAD1E2"/>
           </a:solidFill>
           <a:ln w="19050">
-            <a:solidFill>
-              <a:srgbClr val="CD4C82"/>
-            </a:solidFill>
+            <a:noFill/>
             <a:prstDash val="dash"/>
           </a:ln>
         </p:spPr>
@@ -3606,7 +3739,7 @@
             <a:r>
               <a:rPr sz="1200" b="0" i="0">
                 <a:solidFill>
-                  <a:srgbClr val="6F1F41"/>
+                  <a:srgbClr val="8E8780"/>
                 </a:solidFill>
               </a:rPr>
               <a:t>사진</a:t>
@@ -3616,13 +3749,13 @@
       </p:sp>
       <p:sp>
         <p:nvSpPr>
-          <p:cNvPr id="6" name="TextBox 5"/>
+          <p:cNvPr id="7" name="TextBox 6"/>
           <p:cNvSpPr txBox="1"/>
           <p:nvPr/>
         </p:nvSpPr>
         <p:spPr>
           <a:xfrm>
-            <a:off x="640080" y="4091939"/>
+            <a:off x="640080" y="4160520"/>
             <a:ext cx="4998567" cy="411480"/>
           </a:xfrm>
           <a:prstGeom prst="rect">
@@ -3644,7 +3777,7 @@
             <a:r>
               <a:rPr sz="1600" b="1" i="0">
                 <a:solidFill>
-                  <a:srgbClr val="6F1F41"/>
+                  <a:srgbClr val="492735"/>
                 </a:solidFill>
               </a:rPr>
               <a:t>신랑</a:t>
@@ -3654,14 +3787,14 @@
       </p:sp>
       <p:sp>
         <p:nvSpPr>
-          <p:cNvPr id="7" name="TextBox 6"/>
+          <p:cNvPr id="8" name="TextBox 7"/>
           <p:cNvSpPr txBox="1"/>
           <p:nvPr/>
         </p:nvSpPr>
         <p:spPr>
           <a:xfrm>
-            <a:off x="731519" y="4549140"/>
-            <a:ext cx="4815687" cy="1851660"/>
+            <a:off x="731519" y="4617720"/>
+            <a:ext cx="4815687" cy="1737360"/>
           </a:xfrm>
           <a:prstGeom prst="rect">
             <a:avLst/>
@@ -3722,25 +3855,23 @@
       </p:sp>
       <p:sp>
         <p:nvSpPr>
-          <p:cNvPr id="8" name="사진 자리"/>
+          <p:cNvPr id="9" name="사진 자리"/>
           <p:cNvSpPr/>
           <p:nvPr/>
         </p:nvSpPr>
         <p:spPr>
           <a:xfrm>
-            <a:off x="7852181" y="1600200"/>
-            <a:ext cx="2400300" cy="2400300"/>
+            <a:off x="7909331" y="1783080"/>
+            <a:ext cx="2286000" cy="2286000"/>
           </a:xfrm>
           <a:prstGeom prst="ellipse">
             <a:avLst/>
           </a:prstGeom>
           <a:solidFill>
-            <a:srgbClr val="F7D4E3"/>
+            <a:srgbClr val="FAD1E2"/>
           </a:solidFill>
           <a:ln w="19050">
-            <a:solidFill>
-              <a:srgbClr val="CD4C82"/>
-            </a:solidFill>
+            <a:noFill/>
             <a:prstDash val="dash"/>
           </a:ln>
         </p:spPr>
@@ -3758,7 +3889,7 @@
             <a:r>
               <a:rPr sz="1200" b="0" i="0">
                 <a:solidFill>
-                  <a:srgbClr val="6F1F41"/>
+                  <a:srgbClr val="8E8780"/>
                 </a:solidFill>
               </a:rPr>
               <a:t>사진</a:t>
@@ -3768,13 +3899,13 @@
       </p:sp>
       <p:sp>
         <p:nvSpPr>
-          <p:cNvPr id="9" name="TextBox 8"/>
+          <p:cNvPr id="10" name="TextBox 9"/>
           <p:cNvSpPr txBox="1"/>
           <p:nvPr/>
         </p:nvSpPr>
         <p:spPr>
           <a:xfrm>
-            <a:off x="6553047" y="4091939"/>
+            <a:off x="6553047" y="4160520"/>
             <a:ext cx="4998567" cy="411480"/>
           </a:xfrm>
           <a:prstGeom prst="rect">
@@ -3796,7 +3927,7 @@
             <a:r>
               <a:rPr sz="1600" b="1" i="0">
                 <a:solidFill>
-                  <a:srgbClr val="6F1F41"/>
+                  <a:srgbClr val="492735"/>
                 </a:solidFill>
               </a:rPr>
               <a:t>신부</a:t>
@@ -3806,14 +3937,14 @@
       </p:sp>
       <p:sp>
         <p:nvSpPr>
-          <p:cNvPr id="10" name="TextBox 9"/>
+          <p:cNvPr id="11" name="TextBox 10"/>
           <p:cNvSpPr txBox="1"/>
           <p:nvPr/>
         </p:nvSpPr>
         <p:spPr>
           <a:xfrm>
-            <a:off x="6644487" y="4549140"/>
-            <a:ext cx="4815687" cy="1851660"/>
+            <a:off x="6644487" y="4617720"/>
+            <a:ext cx="4815687" cy="1737360"/>
           </a:xfrm>
           <a:prstGeom prst="rect">
             <a:avLst/>
@@ -3886,7 +4017,7 @@
     <p:bg>
       <p:bgPr>
         <a:solidFill>
-          <a:srgbClr val="FCF3F7"/>
+          <a:srgbClr val="FDFAFB"/>
         </a:solidFill>
         <a:effectLst/>
       </p:bgPr>
@@ -3906,14 +4037,14 @@
         </p:nvSpPr>
         <p:spPr>
           <a:xfrm>
-            <a:off x="0" y="0"/>
-            <a:ext cx="12191695" cy="274320"/>
-          </a:xfrm>
-          <a:prstGeom prst="rect">
+            <a:off x="10180015" y="-1645920"/>
+            <a:ext cx="3474720" cy="3474720"/>
+          </a:xfrm>
+          <a:prstGeom prst="ellipse">
             <a:avLst/>
           </a:prstGeom>
           <a:solidFill>
-            <a:srgbClr val="CD4C82"/>
+            <a:srgbClr val="F2A6C6"/>
           </a:solidFill>
           <a:ln>
             <a:noFill/>
@@ -3929,20 +4060,58 @@
       </p:sp>
       <p:sp>
         <p:nvSpPr>
-          <p:cNvPr id="4" name="장식"/>
-          <p:cNvSpPr/>
+          <p:cNvPr id="4" name="상단 라벨"/>
+          <p:cNvSpPr txBox="1"/>
           <p:nvPr/>
         </p:nvSpPr>
         <p:spPr>
           <a:xfrm>
-            <a:off x="0" y="274320"/>
-            <a:ext cx="12191695" cy="54864"/>
+            <a:off x="640080" y="274320"/>
+            <a:ext cx="5486400" cy="274320"/>
           </a:xfrm>
           <a:prstGeom prst="rect">
             <a:avLst/>
           </a:prstGeom>
+          <a:noFill/>
+        </p:spPr>
+        <p:txBody>
+          <a:bodyPr wrap="square" lIns="54864" rIns="54864" tIns="27432" bIns="27432" anchor="ctr">
+            <a:noAutofit/>
+          </a:bodyPr>
+          <a:lstStyle/>
+          <a:p>
+            <a:pPr algn="l">
+              <a:lnSpc>
+                <a:spcPct val="115000"/>
+              </a:lnSpc>
+            </a:pPr>
+            <a:r>
+              <a:rPr sz="900" b="1" i="0" spc="250">
+                <a:solidFill>
+                  <a:srgbClr val="26231F"/>
+                </a:solidFill>
+              </a:rPr>
+              <a:t>WEDDING</a:t>
+            </a:r>
+          </a:p>
+        </p:txBody>
+      </p:sp>
+      <p:sp>
+        <p:nvSpPr>
+          <p:cNvPr id="5" name="포인트"/>
+          <p:cNvSpPr/>
+          <p:nvPr/>
+        </p:nvSpPr>
+        <p:spPr>
+          <a:xfrm>
+            <a:off x="11048695" y="502919"/>
+            <a:ext cx="274320" cy="109728"/>
+          </a:xfrm>
+          <a:prstGeom prst="wave">
+            <a:avLst/>
+          </a:prstGeom>
           <a:solidFill>
-            <a:srgbClr val="339941"/>
+            <a:srgbClr val="FFFFFF"/>
           </a:solidFill>
           <a:ln>
             <a:noFill/>
@@ -3968,8 +4137,8 @@
         </p:nvSpPr>
         <p:spPr>
           <a:xfrm>
-            <a:off x="640080" y="457200"/>
-            <a:ext cx="9722815" cy="868680"/>
+            <a:off x="640080" y="658368"/>
+            <a:ext cx="9082735" cy="868680"/>
           </a:xfrm>
         </p:spPr>
         <p:txBody>
@@ -3986,7 +4155,7 @@
             <a:r>
               <a:rPr sz="3000" b="1" i="0">
                 <a:solidFill>
-                  <a:srgbClr val="6F1F41"/>
+                  <a:srgbClr val="26231F"/>
                 </a:solidFill>
               </a:rPr>
               <a:t>우리 두 사람</a:t>
@@ -3996,26 +4165,26 @@
       </p:sp>
       <p:sp>
         <p:nvSpPr>
-          <p:cNvPr id="5" name="왼쪽 칸"/>
+          <p:cNvPr id="6" name="왼쪽 칸"/>
           <p:cNvSpPr/>
           <p:nvPr/>
         </p:nvSpPr>
         <p:spPr>
           <a:xfrm>
-            <a:off x="640080" y="1600200"/>
-            <a:ext cx="5272887" cy="4800600"/>
+            <a:off x="640080" y="1783080"/>
+            <a:ext cx="5272887" cy="4572000"/>
           </a:xfrm>
           <a:prstGeom prst="roundRect">
             <a:avLst>
-              <a:gd name="adj" fmla="val 8000"/>
+              <a:gd name="adj" fmla="val 3000"/>
             </a:avLst>
           </a:prstGeom>
           <a:solidFill>
-            <a:srgbClr val="FCF3F7"/>
+            <a:srgbClr val="FFFFFF"/>
           </a:solidFill>
-          <a:ln w="12700">
+          <a:ln w="9525">
             <a:solidFill>
-              <a:srgbClr val="F7D4E3"/>
+              <a:srgbClr val="FAD1E2"/>
             </a:solidFill>
           </a:ln>
         </p:spPr>
@@ -4029,13 +4198,42 @@
       </p:sp>
       <p:sp>
         <p:nvSpPr>
-          <p:cNvPr id="6" name="칸 제목 바"/>
+          <p:cNvPr id="7" name="위쪽 띠"/>
           <p:cNvSpPr/>
           <p:nvPr/>
         </p:nvSpPr>
         <p:spPr>
           <a:xfrm>
-            <a:off x="640080" y="1600200"/>
+            <a:off x="649224" y="1792224"/>
+            <a:ext cx="5254599" cy="82296"/>
+          </a:xfrm>
+          <a:prstGeom prst="rect">
+            <a:avLst/>
+          </a:prstGeom>
+          <a:solidFill>
+            <a:srgbClr val="ED97BB"/>
+          </a:solidFill>
+          <a:ln>
+            <a:noFill/>
+          </a:ln>
+        </p:spPr>
+        <p:txBody>
+          <a:bodyPr rtlCol="0" anchor="ctr"/>
+          <a:lstStyle/>
+          <a:p>
+            <a:pPr algn="ctr"/>
+          </a:p>
+        </p:txBody>
+      </p:sp>
+      <p:sp>
+        <p:nvSpPr>
+          <p:cNvPr id="8" name="칸 제목 바"/>
+          <p:cNvSpPr/>
+          <p:nvPr/>
+        </p:nvSpPr>
+        <p:spPr>
+          <a:xfrm>
+            <a:off x="640080" y="1783080"/>
             <a:ext cx="5272887" cy="640080"/>
           </a:xfrm>
           <a:prstGeom prst="roundRect">
@@ -4044,7 +4242,7 @@
             </a:avLst>
           </a:prstGeom>
           <a:solidFill>
-            <a:srgbClr val="CD4C82"/>
+            <a:srgbClr val="ED97BB"/>
           </a:solidFill>
           <a:ln>
             <a:noFill/>
@@ -4060,13 +4258,13 @@
       </p:sp>
       <p:sp>
         <p:nvSpPr>
-          <p:cNvPr id="7" name="TextBox 6"/>
+          <p:cNvPr id="9" name="TextBox 8"/>
           <p:cNvSpPr txBox="1"/>
           <p:nvPr/>
         </p:nvSpPr>
         <p:spPr>
           <a:xfrm>
-            <a:off x="822959" y="1600200"/>
+            <a:off x="822959" y="1783080"/>
             <a:ext cx="4907127" cy="640080"/>
           </a:xfrm>
           <a:prstGeom prst="rect">
@@ -4088,7 +4286,7 @@
             <a:r>
               <a:rPr sz="1800" b="1" i="0">
                 <a:solidFill>
-                  <a:srgbClr val="FFFFFF"/>
+                  <a:srgbClr val="26231F"/>
                 </a:solidFill>
               </a:rPr>
               <a:t>닮은 점</a:t>
@@ -4098,14 +4296,14 @@
       </p:sp>
       <p:sp>
         <p:nvSpPr>
-          <p:cNvPr id="8" name="TextBox 7"/>
+          <p:cNvPr id="10" name="TextBox 9"/>
           <p:cNvSpPr txBox="1"/>
           <p:nvPr/>
         </p:nvSpPr>
         <p:spPr>
           <a:xfrm>
-            <a:off x="868680" y="2423160"/>
-            <a:ext cx="4815687" cy="3886200"/>
+            <a:off x="868680" y="2606040"/>
+            <a:ext cx="4815687" cy="3657600"/>
           </a:xfrm>
           <a:prstGeom prst="rect">
             <a:avLst/>
@@ -4131,7 +4329,7 @@
             <a:r>
               <a:rPr sz="1500" b="0" i="0">
                 <a:solidFill>
-                  <a:srgbClr val="2B2B2B"/>
+                  <a:srgbClr val="26231F"/>
                 </a:solidFill>
               </a:rPr>
               <a:t>내용을 입력하세요</a:t>
@@ -4151,7 +4349,7 @@
             <a:r>
               <a:rPr sz="1500" b="0" i="0">
                 <a:solidFill>
-                  <a:srgbClr val="2B2B2B"/>
+                  <a:srgbClr val="26231F"/>
                 </a:solidFill>
               </a:rPr>
               <a:t>내용을 입력하세요</a:t>
@@ -4171,7 +4369,7 @@
             <a:r>
               <a:rPr sz="1500" b="0" i="0">
                 <a:solidFill>
-                  <a:srgbClr val="2B2B2B"/>
+                  <a:srgbClr val="26231F"/>
                 </a:solidFill>
               </a:rPr>
               <a:t>내용을 입력하세요</a:t>
@@ -4181,26 +4379,26 @@
       </p:sp>
       <p:sp>
         <p:nvSpPr>
-          <p:cNvPr id="9" name="오른쪽 칸"/>
+          <p:cNvPr id="11" name="오른쪽 칸"/>
           <p:cNvSpPr/>
           <p:nvPr/>
         </p:nvSpPr>
         <p:spPr>
           <a:xfrm>
-            <a:off x="6278727" y="1600200"/>
-            <a:ext cx="5272887" cy="4800600"/>
+            <a:off x="6278727" y="1783080"/>
+            <a:ext cx="5272887" cy="4572000"/>
           </a:xfrm>
           <a:prstGeom prst="roundRect">
             <a:avLst>
-              <a:gd name="adj" fmla="val 8000"/>
+              <a:gd name="adj" fmla="val 3000"/>
             </a:avLst>
           </a:prstGeom>
           <a:solidFill>
-            <a:srgbClr val="F7D4E3"/>
+            <a:srgbClr val="FFFFFF"/>
           </a:solidFill>
-          <a:ln w="12700">
+          <a:ln w="9525">
             <a:solidFill>
-              <a:srgbClr val="F7D4E3"/>
+              <a:srgbClr val="FAD1E2"/>
             </a:solidFill>
           </a:ln>
         </p:spPr>
@@ -4214,13 +4412,42 @@
       </p:sp>
       <p:sp>
         <p:nvSpPr>
-          <p:cNvPr id="10" name="칸 제목 바"/>
+          <p:cNvPr id="12" name="위쪽 띠"/>
           <p:cNvSpPr/>
           <p:nvPr/>
         </p:nvSpPr>
         <p:spPr>
           <a:xfrm>
-            <a:off x="6278727" y="1600200"/>
+            <a:off x="6287871" y="1792224"/>
+            <a:ext cx="5254599" cy="82296"/>
+          </a:xfrm>
+          <a:prstGeom prst="rect">
+            <a:avLst/>
+          </a:prstGeom>
+          <a:solidFill>
+            <a:srgbClr val="ED97BB"/>
+          </a:solidFill>
+          <a:ln>
+            <a:noFill/>
+          </a:ln>
+        </p:spPr>
+        <p:txBody>
+          <a:bodyPr rtlCol="0" anchor="ctr"/>
+          <a:lstStyle/>
+          <a:p>
+            <a:pPr algn="ctr"/>
+          </a:p>
+        </p:txBody>
+      </p:sp>
+      <p:sp>
+        <p:nvSpPr>
+          <p:cNvPr id="13" name="칸 제목 바"/>
+          <p:cNvSpPr/>
+          <p:nvPr/>
+        </p:nvSpPr>
+        <p:spPr>
+          <a:xfrm>
+            <a:off x="6278727" y="1783080"/>
             <a:ext cx="5272887" cy="640080"/>
           </a:xfrm>
           <a:prstGeom prst="roundRect">
@@ -4229,7 +4456,7 @@
             </a:avLst>
           </a:prstGeom>
           <a:solidFill>
-            <a:srgbClr val="6F1F41"/>
+            <a:srgbClr val="492735"/>
           </a:solidFill>
           <a:ln>
             <a:noFill/>
@@ -4245,13 +4472,13 @@
       </p:sp>
       <p:sp>
         <p:nvSpPr>
-          <p:cNvPr id="11" name="TextBox 10"/>
+          <p:cNvPr id="14" name="TextBox 13"/>
           <p:cNvSpPr txBox="1"/>
           <p:nvPr/>
         </p:nvSpPr>
         <p:spPr>
           <a:xfrm>
-            <a:off x="6461607" y="1600200"/>
+            <a:off x="6461607" y="1783080"/>
             <a:ext cx="4907127" cy="640080"/>
           </a:xfrm>
           <a:prstGeom prst="rect">
@@ -4283,14 +4510,14 @@
       </p:sp>
       <p:sp>
         <p:nvSpPr>
-          <p:cNvPr id="12" name="TextBox 11"/>
+          <p:cNvPr id="15" name="TextBox 14"/>
           <p:cNvSpPr txBox="1"/>
           <p:nvPr/>
         </p:nvSpPr>
         <p:spPr>
           <a:xfrm>
-            <a:off x="6507327" y="2423160"/>
-            <a:ext cx="4815687" cy="3886200"/>
+            <a:off x="6507327" y="2606040"/>
+            <a:ext cx="4815687" cy="3657600"/>
           </a:xfrm>
           <a:prstGeom prst="rect">
             <a:avLst/>
@@ -4316,7 +4543,7 @@
             <a:r>
               <a:rPr sz="1500" b="0" i="0">
                 <a:solidFill>
-                  <a:srgbClr val="2B2B2B"/>
+                  <a:srgbClr val="26231F"/>
                 </a:solidFill>
               </a:rPr>
               <a:t>내용을 입력하세요</a:t>
@@ -4336,7 +4563,7 @@
             <a:r>
               <a:rPr sz="1500" b="0" i="0">
                 <a:solidFill>
-                  <a:srgbClr val="2B2B2B"/>
+                  <a:srgbClr val="26231F"/>
                 </a:solidFill>
               </a:rPr>
               <a:t>내용을 입력하세요</a:t>
@@ -4356,7 +4583,7 @@
             <a:r>
               <a:rPr sz="1500" b="0" i="0">
                 <a:solidFill>
-                  <a:srgbClr val="2B2B2B"/>
+                  <a:srgbClr val="26231F"/>
                 </a:solidFill>
               </a:rPr>
               <a:t>내용을 입력하세요</a:t>
@@ -4378,7 +4605,7 @@
     <p:bg>
       <p:bgPr>
         <a:solidFill>
-          <a:srgbClr val="FCF3F7"/>
+          <a:srgbClr val="FDFAFB"/>
         </a:solidFill>
         <a:effectLst/>
       </p:bgPr>
@@ -4398,14 +4625,14 @@
         </p:nvSpPr>
         <p:spPr>
           <a:xfrm>
-            <a:off x="0" y="0"/>
-            <a:ext cx="12191695" cy="274320"/>
-          </a:xfrm>
-          <a:prstGeom prst="rect">
+            <a:off x="10180015" y="-1645920"/>
+            <a:ext cx="3474720" cy="3474720"/>
+          </a:xfrm>
+          <a:prstGeom prst="ellipse">
             <a:avLst/>
           </a:prstGeom>
           <a:solidFill>
-            <a:srgbClr val="CD4C82"/>
+            <a:srgbClr val="F2A6C6"/>
           </a:solidFill>
           <a:ln>
             <a:noFill/>
@@ -4421,20 +4648,58 @@
       </p:sp>
       <p:sp>
         <p:nvSpPr>
-          <p:cNvPr id="4" name="장식"/>
-          <p:cNvSpPr/>
+          <p:cNvPr id="4" name="상단 라벨"/>
+          <p:cNvSpPr txBox="1"/>
           <p:nvPr/>
         </p:nvSpPr>
         <p:spPr>
           <a:xfrm>
-            <a:off x="0" y="274320"/>
-            <a:ext cx="12191695" cy="54864"/>
+            <a:off x="640080" y="274320"/>
+            <a:ext cx="5486400" cy="274320"/>
           </a:xfrm>
           <a:prstGeom prst="rect">
             <a:avLst/>
           </a:prstGeom>
+          <a:noFill/>
+        </p:spPr>
+        <p:txBody>
+          <a:bodyPr wrap="square" lIns="54864" rIns="54864" tIns="27432" bIns="27432" anchor="ctr">
+            <a:noAutofit/>
+          </a:bodyPr>
+          <a:lstStyle/>
+          <a:p>
+            <a:pPr algn="l">
+              <a:lnSpc>
+                <a:spcPct val="115000"/>
+              </a:lnSpc>
+            </a:pPr>
+            <a:r>
+              <a:rPr sz="900" b="1" i="0" spc="250">
+                <a:solidFill>
+                  <a:srgbClr val="26231F"/>
+                </a:solidFill>
+              </a:rPr>
+              <a:t>WEDDING</a:t>
+            </a:r>
+          </a:p>
+        </p:txBody>
+      </p:sp>
+      <p:sp>
+        <p:nvSpPr>
+          <p:cNvPr id="5" name="포인트"/>
+          <p:cNvSpPr/>
+          <p:nvPr/>
+        </p:nvSpPr>
+        <p:spPr>
+          <a:xfrm>
+            <a:off x="11048695" y="502919"/>
+            <a:ext cx="274320" cy="109728"/>
+          </a:xfrm>
+          <a:prstGeom prst="wave">
+            <a:avLst/>
+          </a:prstGeom>
           <a:solidFill>
-            <a:srgbClr val="339941"/>
+            <a:srgbClr val="FFFFFF"/>
           </a:solidFill>
           <a:ln>
             <a:noFill/>
@@ -4460,8 +4725,8 @@
         </p:nvSpPr>
         <p:spPr>
           <a:xfrm>
-            <a:off x="640080" y="457200"/>
-            <a:ext cx="9722815" cy="868680"/>
+            <a:off x="640080" y="658368"/>
+            <a:ext cx="9082735" cy="868680"/>
           </a:xfrm>
         </p:spPr>
         <p:txBody>
@@ -4478,7 +4743,7 @@
             <a:r>
               <a:rPr sz="3000" b="1" i="0">
                 <a:solidFill>
-                  <a:srgbClr val="6F1F41"/>
+                  <a:srgbClr val="26231F"/>
                 </a:solidFill>
               </a:rPr>
               <a:t>서로에게 하고 싶은 말</a:t>
@@ -4488,26 +4753,26 @@
       </p:sp>
       <p:sp>
         <p:nvSpPr>
-          <p:cNvPr id="5" name="왼쪽 칸"/>
+          <p:cNvPr id="6" name="왼쪽 칸"/>
           <p:cNvSpPr/>
           <p:nvPr/>
         </p:nvSpPr>
         <p:spPr>
           <a:xfrm>
-            <a:off x="640080" y="1600200"/>
-            <a:ext cx="5272887" cy="4800600"/>
+            <a:off x="640080" y="1783080"/>
+            <a:ext cx="5272887" cy="4572000"/>
           </a:xfrm>
           <a:prstGeom prst="roundRect">
             <a:avLst>
-              <a:gd name="adj" fmla="val 8000"/>
+              <a:gd name="adj" fmla="val 3000"/>
             </a:avLst>
           </a:prstGeom>
           <a:solidFill>
-            <a:srgbClr val="FCF3F7"/>
+            <a:srgbClr val="FFFFFF"/>
           </a:solidFill>
-          <a:ln w="12700">
+          <a:ln w="9525">
             <a:solidFill>
-              <a:srgbClr val="F7D4E3"/>
+              <a:srgbClr val="FAD1E2"/>
             </a:solidFill>
           </a:ln>
         </p:spPr>
@@ -4521,13 +4786,42 @@
       </p:sp>
       <p:sp>
         <p:nvSpPr>
-          <p:cNvPr id="6" name="칸 제목 바"/>
+          <p:cNvPr id="7" name="위쪽 띠"/>
           <p:cNvSpPr/>
           <p:nvPr/>
         </p:nvSpPr>
         <p:spPr>
           <a:xfrm>
-            <a:off x="640080" y="1600200"/>
+            <a:off x="649224" y="1792224"/>
+            <a:ext cx="5254599" cy="82296"/>
+          </a:xfrm>
+          <a:prstGeom prst="rect">
+            <a:avLst/>
+          </a:prstGeom>
+          <a:solidFill>
+            <a:srgbClr val="ED97BB"/>
+          </a:solidFill>
+          <a:ln>
+            <a:noFill/>
+          </a:ln>
+        </p:spPr>
+        <p:txBody>
+          <a:bodyPr rtlCol="0" anchor="ctr"/>
+          <a:lstStyle/>
+          <a:p>
+            <a:pPr algn="ctr"/>
+          </a:p>
+        </p:txBody>
+      </p:sp>
+      <p:sp>
+        <p:nvSpPr>
+          <p:cNvPr id="8" name="칸 제목 바"/>
+          <p:cNvSpPr/>
+          <p:nvPr/>
+        </p:nvSpPr>
+        <p:spPr>
+          <a:xfrm>
+            <a:off x="640080" y="1783080"/>
             <a:ext cx="5272887" cy="640080"/>
           </a:xfrm>
           <a:prstGeom prst="roundRect">
@@ -4536,7 +4830,7 @@
             </a:avLst>
           </a:prstGeom>
           <a:solidFill>
-            <a:srgbClr val="CD4C82"/>
+            <a:srgbClr val="ED97BB"/>
           </a:solidFill>
           <a:ln>
             <a:noFill/>
@@ -4552,13 +4846,13 @@
       </p:sp>
       <p:sp>
         <p:nvSpPr>
-          <p:cNvPr id="7" name="TextBox 6"/>
+          <p:cNvPr id="9" name="TextBox 8"/>
           <p:cNvSpPr txBox="1"/>
           <p:nvPr/>
         </p:nvSpPr>
         <p:spPr>
           <a:xfrm>
-            <a:off x="822959" y="1600200"/>
+            <a:off x="822959" y="1783080"/>
             <a:ext cx="4907127" cy="640080"/>
           </a:xfrm>
           <a:prstGeom prst="rect">
@@ -4580,7 +4874,7 @@
             <a:r>
               <a:rPr sz="1800" b="1" i="0">
                 <a:solidFill>
-                  <a:srgbClr val="FFFFFF"/>
+                  <a:srgbClr val="26231F"/>
                 </a:solidFill>
               </a:rPr>
               <a:t>신랑이 신부에게</a:t>
@@ -4590,14 +4884,14 @@
       </p:sp>
       <p:sp>
         <p:nvSpPr>
-          <p:cNvPr id="8" name="TextBox 7"/>
+          <p:cNvPr id="10" name="TextBox 9"/>
           <p:cNvSpPr txBox="1"/>
           <p:nvPr/>
         </p:nvSpPr>
         <p:spPr>
           <a:xfrm>
-            <a:off x="868680" y="2423160"/>
-            <a:ext cx="4815687" cy="3886200"/>
+            <a:off x="868680" y="2606040"/>
+            <a:ext cx="4815687" cy="3657600"/>
           </a:xfrm>
           <a:prstGeom prst="rect">
             <a:avLst/>
@@ -4623,7 +4917,7 @@
             <a:r>
               <a:rPr sz="1500" b="0" i="0">
                 <a:solidFill>
-                  <a:srgbClr val="2B2B2B"/>
+                  <a:srgbClr val="26231F"/>
                 </a:solidFill>
               </a:rPr>
               <a:t>하고 싶은 말을 적어 주세요</a:t>
@@ -4633,26 +4927,26 @@
       </p:sp>
       <p:sp>
         <p:nvSpPr>
-          <p:cNvPr id="9" name="오른쪽 칸"/>
+          <p:cNvPr id="11" name="오른쪽 칸"/>
           <p:cNvSpPr/>
           <p:nvPr/>
         </p:nvSpPr>
         <p:spPr>
           <a:xfrm>
-            <a:off x="6278727" y="1600200"/>
-            <a:ext cx="5272887" cy="4800600"/>
+            <a:off x="6278727" y="1783080"/>
+            <a:ext cx="5272887" cy="4572000"/>
           </a:xfrm>
           <a:prstGeom prst="roundRect">
             <a:avLst>
-              <a:gd name="adj" fmla="val 8000"/>
+              <a:gd name="adj" fmla="val 3000"/>
             </a:avLst>
           </a:prstGeom>
           <a:solidFill>
-            <a:srgbClr val="F7D4E3"/>
+            <a:srgbClr val="FFFFFF"/>
           </a:solidFill>
-          <a:ln w="12700">
+          <a:ln w="9525">
             <a:solidFill>
-              <a:srgbClr val="F7D4E3"/>
+              <a:srgbClr val="FAD1E2"/>
             </a:solidFill>
           </a:ln>
         </p:spPr>
@@ -4666,13 +4960,42 @@
       </p:sp>
       <p:sp>
         <p:nvSpPr>
-          <p:cNvPr id="10" name="칸 제목 바"/>
+          <p:cNvPr id="12" name="위쪽 띠"/>
           <p:cNvSpPr/>
           <p:nvPr/>
         </p:nvSpPr>
         <p:spPr>
           <a:xfrm>
-            <a:off x="6278727" y="1600200"/>
+            <a:off x="6287871" y="1792224"/>
+            <a:ext cx="5254599" cy="82296"/>
+          </a:xfrm>
+          <a:prstGeom prst="rect">
+            <a:avLst/>
+          </a:prstGeom>
+          <a:solidFill>
+            <a:srgbClr val="ED97BB"/>
+          </a:solidFill>
+          <a:ln>
+            <a:noFill/>
+          </a:ln>
+        </p:spPr>
+        <p:txBody>
+          <a:bodyPr rtlCol="0" anchor="ctr"/>
+          <a:lstStyle/>
+          <a:p>
+            <a:pPr algn="ctr"/>
+          </a:p>
+        </p:txBody>
+      </p:sp>
+      <p:sp>
+        <p:nvSpPr>
+          <p:cNvPr id="13" name="칸 제목 바"/>
+          <p:cNvSpPr/>
+          <p:nvPr/>
+        </p:nvSpPr>
+        <p:spPr>
+          <a:xfrm>
+            <a:off x="6278727" y="1783080"/>
             <a:ext cx="5272887" cy="640080"/>
           </a:xfrm>
           <a:prstGeom prst="roundRect">
@@ -4681,7 +5004,7 @@
             </a:avLst>
           </a:prstGeom>
           <a:solidFill>
-            <a:srgbClr val="6F1F41"/>
+            <a:srgbClr val="492735"/>
           </a:solidFill>
           <a:ln>
             <a:noFill/>
@@ -4697,13 +5020,13 @@
       </p:sp>
       <p:sp>
         <p:nvSpPr>
-          <p:cNvPr id="11" name="TextBox 10"/>
+          <p:cNvPr id="14" name="TextBox 13"/>
           <p:cNvSpPr txBox="1"/>
           <p:nvPr/>
         </p:nvSpPr>
         <p:spPr>
           <a:xfrm>
-            <a:off x="6461607" y="1600200"/>
+            <a:off x="6461607" y="1783080"/>
             <a:ext cx="4907127" cy="640080"/>
           </a:xfrm>
           <a:prstGeom prst="rect">
@@ -4735,14 +5058,14 @@
       </p:sp>
       <p:sp>
         <p:nvSpPr>
-          <p:cNvPr id="12" name="TextBox 11"/>
+          <p:cNvPr id="15" name="TextBox 14"/>
           <p:cNvSpPr txBox="1"/>
           <p:nvPr/>
         </p:nvSpPr>
         <p:spPr>
           <a:xfrm>
-            <a:off x="6507327" y="2423160"/>
-            <a:ext cx="4815687" cy="3886200"/>
+            <a:off x="6507327" y="2606040"/>
+            <a:ext cx="4815687" cy="3657600"/>
           </a:xfrm>
           <a:prstGeom prst="rect">
             <a:avLst/>
@@ -4768,7 +5091,7 @@
             <a:r>
               <a:rPr sz="1500" b="0" i="0">
                 <a:solidFill>
-                  <a:srgbClr val="2B2B2B"/>
+                  <a:srgbClr val="26231F"/>
                 </a:solidFill>
               </a:rPr>
               <a:t>하고 싶은 말을 적어 주세요</a:t>
@@ -4790,7 +5113,7 @@
     <p:bg>
       <p:bgPr>
         <a:solidFill>
-          <a:srgbClr val="FCF3F7"/>
+          <a:srgbClr val="FDFAFB"/>
         </a:solidFill>
         <a:effectLst/>
       </p:bgPr>
@@ -4810,14 +5133,14 @@
         </p:nvSpPr>
         <p:spPr>
           <a:xfrm>
-            <a:off x="0" y="0"/>
-            <a:ext cx="12191695" cy="274320"/>
-          </a:xfrm>
-          <a:prstGeom prst="rect">
+            <a:off x="10180015" y="-1645920"/>
+            <a:ext cx="3474720" cy="3474720"/>
+          </a:xfrm>
+          <a:prstGeom prst="ellipse">
             <a:avLst/>
           </a:prstGeom>
           <a:solidFill>
-            <a:srgbClr val="CD4C82"/>
+            <a:srgbClr val="F2A6C6"/>
           </a:solidFill>
           <a:ln>
             <a:noFill/>
@@ -4833,20 +5156,58 @@
       </p:sp>
       <p:sp>
         <p:nvSpPr>
-          <p:cNvPr id="4" name="장식"/>
-          <p:cNvSpPr/>
+          <p:cNvPr id="4" name="상단 라벨"/>
+          <p:cNvSpPr txBox="1"/>
           <p:nvPr/>
         </p:nvSpPr>
         <p:spPr>
           <a:xfrm>
-            <a:off x="0" y="274320"/>
-            <a:ext cx="12191695" cy="54864"/>
+            <a:off x="640080" y="274320"/>
+            <a:ext cx="5486400" cy="274320"/>
           </a:xfrm>
           <a:prstGeom prst="rect">
             <a:avLst/>
           </a:prstGeom>
+          <a:noFill/>
+        </p:spPr>
+        <p:txBody>
+          <a:bodyPr wrap="square" lIns="54864" rIns="54864" tIns="27432" bIns="27432" anchor="ctr">
+            <a:noAutofit/>
+          </a:bodyPr>
+          <a:lstStyle/>
+          <a:p>
+            <a:pPr algn="l">
+              <a:lnSpc>
+                <a:spcPct val="115000"/>
+              </a:lnSpc>
+            </a:pPr>
+            <a:r>
+              <a:rPr sz="900" b="1" i="0" spc="250">
+                <a:solidFill>
+                  <a:srgbClr val="26231F"/>
+                </a:solidFill>
+              </a:rPr>
+              <a:t>WEDDING</a:t>
+            </a:r>
+          </a:p>
+        </p:txBody>
+      </p:sp>
+      <p:sp>
+        <p:nvSpPr>
+          <p:cNvPr id="5" name="포인트"/>
+          <p:cNvSpPr/>
+          <p:nvPr/>
+        </p:nvSpPr>
+        <p:spPr>
+          <a:xfrm>
+            <a:off x="11048695" y="502919"/>
+            <a:ext cx="274320" cy="109728"/>
+          </a:xfrm>
+          <a:prstGeom prst="wave">
+            <a:avLst/>
+          </a:prstGeom>
           <a:solidFill>
-            <a:srgbClr val="339941"/>
+            <a:srgbClr val="FFFFFF"/>
           </a:solidFill>
           <a:ln>
             <a:noFill/>
@@ -4872,8 +5233,8 @@
         </p:nvSpPr>
         <p:spPr>
           <a:xfrm>
-            <a:off x="640080" y="457200"/>
-            <a:ext cx="9722815" cy="868680"/>
+            <a:off x="640080" y="658368"/>
+            <a:ext cx="9082735" cy="868680"/>
           </a:xfrm>
         </p:spPr>
         <p:txBody>
@@ -4890,7 +5251,7 @@
             <a:r>
               <a:rPr sz="3000" b="1" i="0">
                 <a:solidFill>
-                  <a:srgbClr val="6F1F41"/>
+                  <a:srgbClr val="26231F"/>
                 </a:solidFill>
               </a:rPr>
               <a:t>웨딩 사진</a:t>
@@ -4900,14 +5261,14 @@
       </p:sp>
       <p:sp>
         <p:nvSpPr>
-          <p:cNvPr id="5" name="사진 자리"/>
+          <p:cNvPr id="6" name="사진 자리"/>
           <p:cNvSpPr/>
           <p:nvPr/>
         </p:nvSpPr>
         <p:spPr>
           <a:xfrm>
-            <a:off x="640080" y="1600200"/>
-            <a:ext cx="3515258" cy="2308860"/>
+            <a:off x="640080" y="1783080"/>
+            <a:ext cx="3515258" cy="2194560"/>
           </a:xfrm>
           <a:prstGeom prst="roundRect">
             <a:avLst>
@@ -4915,12 +5276,10 @@
             </a:avLst>
           </a:prstGeom>
           <a:solidFill>
-            <a:srgbClr val="F7D4E3"/>
+            <a:srgbClr val="FAD1E2"/>
           </a:solidFill>
           <a:ln w="19050">
-            <a:solidFill>
-              <a:srgbClr val="CD4C82"/>
-            </a:solidFill>
+            <a:noFill/>
             <a:prstDash val="dash"/>
           </a:ln>
         </p:spPr>
@@ -4938,7 +5297,7 @@
             <a:r>
               <a:rPr sz="1200" b="0" i="0">
                 <a:solidFill>
-                  <a:srgbClr val="6F1F41"/>
+                  <a:srgbClr val="8E8780"/>
                 </a:solidFill>
               </a:rPr>
               <a:t>사진 1</a:t>
@@ -4948,14 +5307,14 @@
       </p:sp>
       <p:sp>
         <p:nvSpPr>
-          <p:cNvPr id="6" name="사진 자리"/>
+          <p:cNvPr id="7" name="사진 자리"/>
           <p:cNvSpPr/>
           <p:nvPr/>
         </p:nvSpPr>
         <p:spPr>
           <a:xfrm>
-            <a:off x="4338218" y="1600200"/>
-            <a:ext cx="3515258" cy="2308860"/>
+            <a:off x="4338218" y="1783080"/>
+            <a:ext cx="3515258" cy="2194560"/>
           </a:xfrm>
           <a:prstGeom prst="roundRect">
             <a:avLst>
@@ -4963,12 +5322,10 @@
             </a:avLst>
           </a:prstGeom>
           <a:solidFill>
-            <a:srgbClr val="F7D4E3"/>
+            <a:srgbClr val="FAD1E2"/>
           </a:solidFill>
           <a:ln w="19050">
-            <a:solidFill>
-              <a:srgbClr val="CD4C82"/>
-            </a:solidFill>
+            <a:noFill/>
             <a:prstDash val="dash"/>
           </a:ln>
         </p:spPr>
@@ -4986,7 +5343,7 @@
             <a:r>
               <a:rPr sz="1200" b="0" i="0">
                 <a:solidFill>
-                  <a:srgbClr val="6F1F41"/>
+                  <a:srgbClr val="8E8780"/>
                 </a:solidFill>
               </a:rPr>
               <a:t>사진 2</a:t>
@@ -4996,14 +5353,14 @@
       </p:sp>
       <p:sp>
         <p:nvSpPr>
-          <p:cNvPr id="7" name="사진 자리"/>
+          <p:cNvPr id="8" name="사진 자리"/>
           <p:cNvSpPr/>
           <p:nvPr/>
         </p:nvSpPr>
         <p:spPr>
           <a:xfrm>
-            <a:off x="8036356" y="1600200"/>
-            <a:ext cx="3515258" cy="2308860"/>
+            <a:off x="8036356" y="1783080"/>
+            <a:ext cx="3515258" cy="2194560"/>
           </a:xfrm>
           <a:prstGeom prst="roundRect">
             <a:avLst>
@@ -5011,12 +5368,10 @@
             </a:avLst>
           </a:prstGeom>
           <a:solidFill>
-            <a:srgbClr val="F7D4E3"/>
+            <a:srgbClr val="FAD1E2"/>
           </a:solidFill>
           <a:ln w="19050">
-            <a:solidFill>
-              <a:srgbClr val="CD4C82"/>
-            </a:solidFill>
+            <a:noFill/>
             <a:prstDash val="dash"/>
           </a:ln>
         </p:spPr>
@@ -5034,7 +5389,7 @@
             <a:r>
               <a:rPr sz="1200" b="0" i="0">
                 <a:solidFill>
-                  <a:srgbClr val="6F1F41"/>
+                  <a:srgbClr val="8E8780"/>
                 </a:solidFill>
               </a:rPr>
               <a:t>사진 3</a:t>
@@ -5044,14 +5399,14 @@
       </p:sp>
       <p:sp>
         <p:nvSpPr>
-          <p:cNvPr id="8" name="사진 자리"/>
+          <p:cNvPr id="9" name="사진 자리"/>
           <p:cNvSpPr/>
           <p:nvPr/>
         </p:nvSpPr>
         <p:spPr>
           <a:xfrm>
-            <a:off x="640080" y="4091939"/>
-            <a:ext cx="3515258" cy="2308860"/>
+            <a:off x="640080" y="4160520"/>
+            <a:ext cx="3515258" cy="2194560"/>
           </a:xfrm>
           <a:prstGeom prst="roundRect">
             <a:avLst>
@@ -5059,12 +5414,10 @@
             </a:avLst>
           </a:prstGeom>
           <a:solidFill>
-            <a:srgbClr val="F7D4E3"/>
+            <a:srgbClr val="FAD1E2"/>
           </a:solidFill>
           <a:ln w="19050">
-            <a:solidFill>
-              <a:srgbClr val="CD4C82"/>
-            </a:solidFill>
+            <a:noFill/>
             <a:prstDash val="dash"/>
           </a:ln>
         </p:spPr>
@@ -5082,7 +5435,7 @@
             <a:r>
               <a:rPr sz="1200" b="0" i="0">
                 <a:solidFill>
-                  <a:srgbClr val="6F1F41"/>
+                  <a:srgbClr val="8E8780"/>
                 </a:solidFill>
               </a:rPr>
               <a:t>사진 4</a:t>
@@ -5092,14 +5445,14 @@
       </p:sp>
       <p:sp>
         <p:nvSpPr>
-          <p:cNvPr id="9" name="사진 자리"/>
+          <p:cNvPr id="10" name="사진 자리"/>
           <p:cNvSpPr/>
           <p:nvPr/>
         </p:nvSpPr>
         <p:spPr>
           <a:xfrm>
-            <a:off x="4338218" y="4091939"/>
-            <a:ext cx="3515258" cy="2308860"/>
+            <a:off x="4338218" y="4160520"/>
+            <a:ext cx="3515258" cy="2194560"/>
           </a:xfrm>
           <a:prstGeom prst="roundRect">
             <a:avLst>
@@ -5107,12 +5460,10 @@
             </a:avLst>
           </a:prstGeom>
           <a:solidFill>
-            <a:srgbClr val="F7D4E3"/>
+            <a:srgbClr val="FAD1E2"/>
           </a:solidFill>
           <a:ln w="19050">
-            <a:solidFill>
-              <a:srgbClr val="CD4C82"/>
-            </a:solidFill>
+            <a:noFill/>
             <a:prstDash val="dash"/>
           </a:ln>
         </p:spPr>
@@ -5130,7 +5481,7 @@
             <a:r>
               <a:rPr sz="1200" b="0" i="0">
                 <a:solidFill>
-                  <a:srgbClr val="6F1F41"/>
+                  <a:srgbClr val="8E8780"/>
                 </a:solidFill>
               </a:rPr>
               <a:t>사진 5</a:t>
@@ -5140,14 +5491,14 @@
       </p:sp>
       <p:sp>
         <p:nvSpPr>
-          <p:cNvPr id="10" name="사진 자리"/>
+          <p:cNvPr id="11" name="사진 자리"/>
           <p:cNvSpPr/>
           <p:nvPr/>
         </p:nvSpPr>
         <p:spPr>
           <a:xfrm>
-            <a:off x="8036356" y="4091939"/>
-            <a:ext cx="3515258" cy="2308860"/>
+            <a:off x="8036356" y="4160520"/>
+            <a:ext cx="3515258" cy="2194560"/>
           </a:xfrm>
           <a:prstGeom prst="roundRect">
             <a:avLst>
@@ -5155,12 +5506,10 @@
             </a:avLst>
           </a:prstGeom>
           <a:solidFill>
-            <a:srgbClr val="F7D4E3"/>
+            <a:srgbClr val="FAD1E2"/>
           </a:solidFill>
           <a:ln w="19050">
-            <a:solidFill>
-              <a:srgbClr val="CD4C82"/>
-            </a:solidFill>
+            <a:noFill/>
             <a:prstDash val="dash"/>
           </a:ln>
         </p:spPr>
@@ -5178,7 +5527,7 @@
             <a:r>
               <a:rPr sz="1200" b="0" i="0">
                 <a:solidFill>
-                  <a:srgbClr val="6F1F41"/>
+                  <a:srgbClr val="8E8780"/>
                 </a:solidFill>
               </a:rPr>
               <a:t>사진 6</a:t>
@@ -5197,6 +5546,14 @@
 <file path=ppt/slides/slide6.xml><?xml version="1.0" encoding="utf-8"?>
 <p:sld xmlns:a="http://schemas.openxmlformats.org/drawingml/2006/main" xmlns:p="http://schemas.openxmlformats.org/presentationml/2006/main" xmlns:r="http://schemas.openxmlformats.org/officeDocument/2006/relationships">
   <p:cSld>
+    <p:bg>
+      <p:bgPr>
+        <a:solidFill>
+          <a:srgbClr val="FDEAF2"/>
+        </a:solidFill>
+        <a:effectLst/>
+      </p:bgPr>
+    </p:bg>
     <p:spTree>
       <p:nvGrpSpPr>
         <p:cNvPr id="1" name=""/>
@@ -5204,30 +5561,119 @@
         <p:nvPr/>
       </p:nvGrpSpPr>
       <p:grpSpPr/>
-      <p:pic>
-        <p:nvPicPr>
-          <p:cNvPr id="3" name="표지 그림" descr="wedding-01.jpg"/>
-          <p:cNvPicPr>
-            <a:picLocks noChangeAspect="1"/>
-          </p:cNvPicPr>
+      <p:sp>
+        <p:nvSpPr>
+          <p:cNvPr id="3" name="사진 자리"/>
+          <p:cNvSpPr/>
           <p:nvPr/>
-        </p:nvPicPr>
-        <p:blipFill>
-          <a:blip r:embed="rId2"/>
-          <a:stretch>
-            <a:fillRect/>
-          </a:stretch>
-        </p:blipFill>
-        <p:spPr>
-          <a:xfrm>
-            <a:off x="0" y="0"/>
-            <a:ext cx="12191695" cy="6858000"/>
+        </p:nvSpPr>
+        <p:spPr>
+          <a:xfrm>
+            <a:off x="7558851" y="685800"/>
+            <a:ext cx="3169840" cy="5486400"/>
+          </a:xfrm>
+          <a:prstGeom prst="round2SameRect">
+            <a:avLst>
+              <a:gd name="adj1" fmla="val 50000"/>
+              <a:gd name="adj2" fmla="val 0"/>
+            </a:avLst>
+          </a:prstGeom>
+          <a:solidFill>
+            <a:srgbClr val="F2A6C6"/>
+          </a:solidFill>
+          <a:ln>
+            <a:noFill/>
+          </a:ln>
+        </p:spPr>
+        <p:txBody>
+          <a:bodyPr rtlCol="0" anchor="ctr" wrap="square" lIns="54864" rIns="54864" tIns="27432" bIns="27432">
+            <a:noAutofit/>
+          </a:bodyPr>
+          <a:lstStyle/>
+          <a:p>
+            <a:pPr algn="ctr">
+              <a:lnSpc>
+                <a:spcPct val="100000"/>
+              </a:lnSpc>
+            </a:pPr>
+            <a:r>
+              <a:rPr sz="1400" b="0" i="0">
+                <a:solidFill>
+                  <a:srgbClr val="492735"/>
+                </a:solidFill>
+              </a:rPr>
+              <a:t>사진을 넣어 주세요</a:t>
+            </a:r>
+          </a:p>
+        </p:txBody>
+      </p:sp>
+      <p:sp>
+        <p:nvSpPr>
+          <p:cNvPr id="4" name="장식"/>
+          <p:cNvSpPr/>
+          <p:nvPr/>
+        </p:nvSpPr>
+        <p:spPr>
+          <a:xfrm>
+            <a:off x="6827349" y="4251960"/>
+            <a:ext cx="1005840" cy="1005840"/>
+          </a:xfrm>
+          <a:prstGeom prst="ellipse">
+            <a:avLst/>
+          </a:prstGeom>
+          <a:solidFill>
+            <a:srgbClr val="F2A6C6"/>
+          </a:solidFill>
+          <a:ln>
+            <a:noFill/>
+          </a:ln>
+        </p:spPr>
+        <p:txBody>
+          <a:bodyPr rtlCol="0" anchor="ctr"/>
+          <a:lstStyle/>
+          <a:p>
+            <a:pPr algn="ctr"/>
+          </a:p>
+        </p:txBody>
+      </p:sp>
+      <p:sp>
+        <p:nvSpPr>
+          <p:cNvPr id="5" name="라벨"/>
+          <p:cNvSpPr txBox="1"/>
+          <p:nvPr/>
+        </p:nvSpPr>
+        <p:spPr>
+          <a:xfrm>
+            <a:off x="822960" y="2148840"/>
+            <a:ext cx="5608179" cy="274320"/>
           </a:xfrm>
           <a:prstGeom prst="rect">
             <a:avLst/>
           </a:prstGeom>
-        </p:spPr>
-      </p:pic>
+          <a:noFill/>
+        </p:spPr>
+        <p:txBody>
+          <a:bodyPr wrap="square" lIns="54864" rIns="54864" tIns="27432" bIns="27432" anchor="t">
+            <a:noAutofit/>
+          </a:bodyPr>
+          <a:lstStyle/>
+          <a:p>
+            <a:pPr algn="l">
+              <a:lnSpc>
+                <a:spcPct val="115000"/>
+              </a:lnSpc>
+            </a:pPr>
+            <a:r>
+              <a:rPr sz="1000" b="1" i="0" spc="250">
+                <a:solidFill>
+                  <a:srgbClr val="26231F"/>
+                </a:solidFill>
+              </a:rPr>
+              <a:t>WEDDING</a:t>
+            </a:r>
+          </a:p>
+        </p:txBody>
+      </p:sp>
       <p:sp>
         <p:nvSpPr>
           <p:cNvPr id="2" name="Title 1"/>
@@ -5240,8 +5686,8 @@
         </p:nvSpPr>
         <p:spPr>
           <a:xfrm>
-            <a:off x="853418" y="2057400"/>
-            <a:ext cx="6095847" cy="1554480"/>
+            <a:off x="822960" y="2606040"/>
+            <a:ext cx="5608179" cy="1188720"/>
           </a:xfrm>
         </p:spPr>
         <p:txBody>
@@ -5258,7 +5704,7 @@
             <a:r>
               <a:rPr sz="3400" b="1" i="0">
                 <a:solidFill>
-                  <a:srgbClr val="6F1F41"/>
+                  <a:srgbClr val="26231F"/>
                 </a:solidFill>
               </a:rPr>
               <a:t>와 주셔서 고맙습니다</a:t>
@@ -5268,14 +5714,14 @@
       </p:sp>
       <p:sp>
         <p:nvSpPr>
-          <p:cNvPr id="4" name="한 줄 문구"/>
+          <p:cNvPr id="6" name="한 줄 문구"/>
           <p:cNvSpPr txBox="1"/>
           <p:nvPr/>
         </p:nvSpPr>
         <p:spPr>
           <a:xfrm>
-            <a:off x="853418" y="3749039"/>
-            <a:ext cx="6095847" cy="822960"/>
+            <a:off x="822960" y="3886200"/>
+            <a:ext cx="5608179" cy="822960"/>
           </a:xfrm>
           <a:prstGeom prst="rect">
             <a:avLst/>
@@ -5294,9 +5740,9 @@
               </a:lnSpc>
             </a:pPr>
             <a:r>
-              <a:rPr sz="1700" b="0" i="1">
-                <a:solidFill>
-                  <a:srgbClr val="6F1F41"/>
+              <a:rPr sz="1700" b="0" i="0">
+                <a:solidFill>
+                  <a:srgbClr val="26231F"/>
                 </a:solidFill>
               </a:rPr>
               <a:t>잘 살겠습니다</a:t>
@@ -5306,14 +5752,14 @@
       </p:sp>
       <p:sp>
         <p:nvSpPr>
-          <p:cNvPr id="5" name="안내 문구"/>
+          <p:cNvPr id="7" name="안내 문구"/>
           <p:cNvSpPr txBox="1"/>
           <p:nvPr/>
         </p:nvSpPr>
         <p:spPr>
           <a:xfrm>
-            <a:off x="853418" y="4617720"/>
-            <a:ext cx="6095847" cy="914400"/>
+            <a:off x="822960" y="4754880"/>
+            <a:ext cx="5608179" cy="914400"/>
           </a:xfrm>
           <a:prstGeom prst="rect">
             <a:avLst/>
@@ -5334,7 +5780,7 @@
             <a:r>
               <a:rPr sz="1400" b="0" i="0">
                 <a:solidFill>
-                  <a:srgbClr val="666666"/>
+                  <a:srgbClr val="26231F"/>
                 </a:solidFill>
               </a:rPr>
               <a:t>신랑 이름 ♥ 신부 이름</a:t>
@@ -5361,34 +5807,34 @@
         <a:sysClr val="window" lastClr="FFFFFF"/>
       </a:lt1>
       <a:dk2>
-        <a:srgbClr val="6F1F41"/>
+        <a:srgbClr val="492735"/>
       </a:dk2>
       <a:lt2>
-        <a:srgbClr val="FCF3F7"/>
+        <a:srgbClr val="FDEAF2"/>
       </a:lt2>
       <a:accent1>
-        <a:srgbClr val="CD4C82"/>
+        <a:srgbClr val="ED97BB"/>
       </a:accent1>
       <a:accent2>
-        <a:srgbClr val="339941"/>
+        <a:srgbClr val="F3BCBA"/>
       </a:accent2>
       <a:accent3>
-        <a:srgbClr val="6F1F41"/>
+        <a:srgbClr val="492735"/>
       </a:accent3>
       <a:accent4>
-        <a:srgbClr val="F7D4E3"/>
+        <a:srgbClr val="FAD1E2"/>
       </a:accent4>
       <a:accent5>
-        <a:srgbClr val="807262"/>
+        <a:srgbClr val="F0AABA"/>
       </a:accent5>
       <a:accent6>
-        <a:srgbClr val="A9798D"/>
+        <a:srgbClr val="927D86"/>
       </a:accent6>
       <a:hlink>
-        <a:srgbClr val="CD4C82"/>
+        <a:srgbClr val="ED97BB"/>
       </a:hlink>
       <a:folHlink>
-        <a:srgbClr val="6F1F41"/>
+        <a:srgbClr val="492735"/>
       </a:folHlink>
     </a:clrScheme>
     <a:fontScheme name="Office">
